--- a/apps/resources/bundled_files/4-klass-tegerektoo-boljoldoo-sabak.pptx
+++ b/apps/resources/bundled_files/4-klass-tegerektoo-boljoldoo-sabak.pptx
@@ -5196,7 +5196,7 @@
                 </a:solidFill>
                 <a:latin typeface="PT Sans"/>
               </a:rPr>
-              <a:t>4-класс · Математика</a:t>
+              <a:t/>
             </a:r>
           </a:p>
         </p:txBody>
@@ -5688,7 +5688,7 @@
                 </a:solidFill>
                 <a:latin typeface="PT Sans"/>
               </a:rPr>
-              <a:t>4-класс ›</a:t>
+              <a:t/>
             </a:r>
           </a:p>
           <a:p>
@@ -6637,7 +6637,7 @@
                 </a:solidFill>
                 <a:latin typeface="PT Sans"/>
               </a:rPr>
-              <a:t>4-класс ›</a:t>
+              <a:t/>
             </a:r>
           </a:p>
           <a:p>
@@ -8808,7 +8808,7 @@
                 </a:solidFill>
                 <a:latin typeface="PT Sans"/>
               </a:rPr>
-              <a:t>4-класс ›</a:t>
+              <a:t/>
             </a:r>
           </a:p>
           <a:p>
@@ -12118,7 +12118,7 @@
                 </a:solidFill>
                 <a:latin typeface="PT Sans"/>
               </a:rPr>
-              <a:t>4-класс ›</a:t>
+              <a:t/>
             </a:r>
           </a:p>
           <a:p>
@@ -13701,7 +13701,7 @@
                 </a:solidFill>
                 <a:latin typeface="PT Sans"/>
               </a:rPr>
-              <a:t>4-класс ›</a:t>
+              <a:t/>
             </a:r>
           </a:p>
           <a:p>
@@ -14413,7 +14413,7 @@
                 </a:solidFill>
                 <a:latin typeface="PT Sans"/>
               </a:rPr>
-              <a:t>4-класс ›</a:t>
+              <a:t/>
             </a:r>
           </a:p>
           <a:p>
@@ -15125,7 +15125,7 @@
                 </a:solidFill>
                 <a:latin typeface="PT Sans"/>
               </a:rPr>
-              <a:t>4-класс ›</a:t>
+              <a:t/>
             </a:r>
           </a:p>
           <a:p>
@@ -16791,7 +16791,7 @@
                 </a:solidFill>
                 <a:latin typeface="PT Sans"/>
               </a:rPr>
-              <a:t>4-класс ›</a:t>
+              <a:t/>
             </a:r>
           </a:p>
           <a:p>
@@ -17875,7 +17875,7 @@
                 </a:solidFill>
                 <a:latin typeface="PT Sans"/>
               </a:rPr>
-              <a:t>4-класс ›</a:t>
+              <a:t/>
             </a:r>
           </a:p>
           <a:p>
@@ -19405,7 +19405,7 @@
                 </a:solidFill>
                 <a:latin typeface="PT Sans"/>
               </a:rPr>
-              <a:t>4-класс ›</a:t>
+              <a:t/>
             </a:r>
           </a:p>
           <a:p>
@@ -21307,7 +21307,7 @@
                 </a:solidFill>
                 <a:latin typeface="PT Sans"/>
               </a:rPr>
-              <a:t>4-класс ›</a:t>
+              <a:t/>
             </a:r>
           </a:p>
           <a:p>
@@ -22584,7 +22584,7 @@
                 </a:solidFill>
                 <a:latin typeface="PT Sans"/>
               </a:rPr>
-              <a:t>4-класс ›</a:t>
+              <a:t/>
             </a:r>
           </a:p>
           <a:p>
@@ -24012,7 +24012,7 @@
                 </a:solidFill>
                 <a:latin typeface="PT Sans"/>
               </a:rPr>
-              <a:t>4-класс ›</a:t>
+              <a:t/>
             </a:r>
           </a:p>
           <a:p>
@@ -25468,7 +25468,7 @@
                 </a:solidFill>
                 <a:latin typeface="PT Sans"/>
               </a:rPr>
-              <a:t>4-класс ›</a:t>
+              <a:t/>
             </a:r>
           </a:p>
           <a:p>
@@ -26537,7 +26537,7 @@
                 </a:solidFill>
                 <a:latin typeface="PT Sans"/>
               </a:rPr>
-              <a:t>4-класс ›</a:t>
+              <a:t/>
             </a:r>
           </a:p>
           <a:p>
@@ -27337,7 +27337,7 @@
                 </a:solidFill>
                 <a:latin typeface="PT Sans"/>
               </a:rPr>
-              <a:t>4-класс ›</a:t>
+              <a:t/>
             </a:r>
           </a:p>
           <a:p>
@@ -28178,7 +28178,7 @@
                 </a:solidFill>
                 <a:latin typeface="PT Sans"/>
               </a:rPr>
-              <a:t>4-класс ›</a:t>
+              <a:t/>
             </a:r>
           </a:p>
           <a:p>
@@ -29127,7 +29127,7 @@
                 </a:solidFill>
                 <a:latin typeface="PT Sans"/>
               </a:rPr>
-              <a:t>4-класс ›</a:t>
+              <a:t/>
             </a:r>
           </a:p>
           <a:p>
@@ -30581,7 +30581,7 @@
                 </a:solidFill>
                 <a:latin typeface="PT Sans"/>
               </a:rPr>
-              <a:t>4-класс ›</a:t>
+              <a:t/>
             </a:r>
           </a:p>
           <a:p>
@@ -31327,7 +31327,7 @@
                 </a:solidFill>
                 <a:latin typeface="PT Sans"/>
               </a:rPr>
-              <a:t>4-класс ›</a:t>
+              <a:t/>
             </a:r>
           </a:p>
           <a:p>
@@ -32135,7 +32135,7 @@
                 </a:solidFill>
                 <a:latin typeface="PT Sans"/>
               </a:rPr>
-              <a:t>4-класс ›</a:t>
+              <a:t/>
             </a:r>
           </a:p>
           <a:p>
@@ -33326,7 +33326,7 @@
                 </a:solidFill>
                 <a:latin typeface="PT Sans"/>
               </a:rPr>
-              <a:t>4-класс ›</a:t>
+              <a:t/>
             </a:r>
           </a:p>
           <a:p>
@@ -34505,7 +34505,7 @@
                 </a:solidFill>
                 <a:latin typeface="PT Sans"/>
               </a:rPr>
-              <a:t>4-класс ›</a:t>
+              <a:t/>
             </a:r>
           </a:p>
           <a:p>
@@ -34686,7 +34686,7 @@
                 </a:solidFill>
                 <a:latin typeface="PT Sans"/>
               </a:rPr>
-              <a:t>2-класс</a:t>
+              <a:t/>
             </a:r>
           </a:p>
         </p:txBody>
@@ -34866,7 +34866,7 @@
                 </a:solidFill>
                 <a:latin typeface="PT Sans"/>
               </a:rPr>
-              <a:t>3-класс</a:t>
+              <a:t/>
             </a:r>
           </a:p>
         </p:txBody>
@@ -35046,7 +35046,7 @@
                 </a:solidFill>
                 <a:latin typeface="PT Sans"/>
               </a:rPr>
-              <a:t>4-класс</a:t>
+              <a:t/>
             </a:r>
           </a:p>
         </p:txBody>
@@ -35282,7 +35282,7 @@
                 </a:solidFill>
                 <a:latin typeface="PT Sans"/>
               </a:rPr>
-              <a:t>5-класс</a:t>
+              <a:t/>
             </a:r>
           </a:p>
         </p:txBody>
@@ -35702,7 +35702,7 @@
                 </a:solidFill>
                 <a:latin typeface="PT Sans"/>
               </a:rPr>
-              <a:t>4-класс ›</a:t>
+              <a:t/>
             </a:r>
           </a:p>
           <a:p>
@@ -36850,7 +36850,7 @@
                 </a:solidFill>
                 <a:latin typeface="PT Sans"/>
               </a:rPr>
-              <a:t>4-класс ›</a:t>
+              <a:t/>
             </a:r>
           </a:p>
           <a:p>

--- a/apps/resources/bundled_files/4-klass-tegerektoo-boljoldoo-sabak.pptx
+++ b/apps/resources/bundled_files/4-klass-tegerektoo-boljoldoo-sabak.pptx
@@ -1582,7 +1582,7 @@
           <a:lstStyle/>
           <a:p>
             <a:r>
-              <a:t>Ой жүгүртүү маданияты (Wenxi Lee, 2.6).</a:t>
+              <a:t>Ой жүгүртүү маданияты (Wenxi Lee, 2,6).</a:t>
             </a:r>
           </a:p>
         </p:txBody>
